--- a/docs/content/weather/weather_lecture.pptx
+++ b/docs/content/weather/weather_lecture.pptx
@@ -3373,7 +3373,7 @@
             </a:pPr>
             <a:r>
               <a:rPr/>
-              <a:t>2026-07-05</a:t>
+              <a:t>2026-08-27</a:t>
             </a:r>
           </a:p>
         </p:txBody>
@@ -5482,7 +5482,7 @@
                 </a:solidFill>
                 <a:latin typeface="Courier"/>
               </a:rPr>
-              <a:t>"steelblue"</a:t>
+              <a:t>"darkblue"</a:t>
             </a:r>
             <a:r>
               <a:rPr>
@@ -11466,7 +11466,7 @@
                 </a:solidFill>
                 <a:latin typeface="Courier"/>
               </a:rPr>
-              <a:t>"steelblue"</a:t>
+              <a:t>"darkblue"</a:t>
             </a:r>
             <a:br/>
             <a:r>
@@ -13408,42 +13408,52 @@
           <a:p>
             <a:pPr lvl="0"/>
             <a:r>
-              <a:rPr sz="2000" b="1"/>
-              <a:t>Predicting first</a:t>
-            </a:r>
-            <a:r>
               <a:rPr sz="2000"/>
-              <a:t> forces your brain to </a:t>
-            </a:r>
-            <a:r>
-              <a:rPr sz="2000" i="1"/>
-              <a:t>retrieve</a:t>
+              <a:t>Before </a:t>
+            </a:r>
+            <a:r>
+              <a:rPr sz="2000">
+                <a:latin typeface="Courier"/>
+              </a:rPr>
+              <a:t>get_GSOD()</a:t>
             </a:r>
             <a:r>
               <a:rPr sz="2000"/>
-              <a:t> what it knows — the gap between guess and answer is what makes it stick.</a:t>
+              <a:t> runs, guess the row count or the shape of the trend — that guess is what your brain checks the real output against.</a:t>
             </a:r>
           </a:p>
           <a:p>
             <a:pPr lvl="0"/>
             <a:r>
-              <a:rPr sz="2000" b="1"/>
-              <a:t>Typing by hand</a:t>
-            </a:r>
-            <a:r>
               <a:rPr sz="2000"/>
-              <a:t> builds the finger-memory and error-spotting that copy-paste skips.</a:t>
+              <a:t>Retyping </a:t>
+            </a:r>
+            <a:r>
+              <a:rPr sz="2000">
+                <a:latin typeface="Courier"/>
+              </a:rPr>
+              <a:t>group_by(YEAR, MONTH)</a:t>
+            </a:r>
+            <a:r>
+              <a:rPr sz="2000"/>
+              <a:t> instead of pasting it is what makes you notice you meant </a:t>
+            </a:r>
+            <a:r>
+              <a:rPr sz="2000">
+                <a:latin typeface="Courier"/>
+              </a:rPr>
+              <a:t>YEAR</a:t>
+            </a:r>
+            <a:r>
+              <a:rPr sz="2000"/>
+              <a:t> alone.</a:t>
             </a:r>
           </a:p>
           <a:p>
             <a:pPr lvl="0"/>
             <a:r>
-              <a:rPr sz="2000" b="1"/>
-              <a:t>Chunk → immediate practice</a:t>
-            </a:r>
-            <a:r>
               <a:rPr sz="2000"/>
-              <a:t> keeps a new idea in working memory long enough to form a lasting schema.</a:t>
+              <a:t>Downloading, then immediately summarizing in the same sitting, is what keeps the whole workflow — not just isolated commands — in your head.</a:t>
             </a:r>
           </a:p>
         </p:txBody>

--- a/docs/content/weather/weather_lecture.pptx
+++ b/docs/content/weather/weather_lecture.pptx
@@ -13178,7 +13178,7 @@
             </a:pPr>
             <a:r>
               <a:rPr b="1"/>
-              <a:t>Up next — Homework:</a:t>
+              <a:t>Up next — Extension (out of class):</a:t>
             </a:r>
           </a:p>
           <a:p>
@@ -13200,31 +13200,14 @@
             <a:pPr lvl="0"/>
             <a:r>
               <a:rPr/>
-              <a:t>Repeat this entire workflow: download → raw plot → summarize → model the trend</a:t>
+              <a:t>Repeat the workflow: download → summarize → model the annual trend</a:t>
             </a:r>
           </a:p>
           <a:p>
             <a:pPr lvl="0"/>
             <a:r>
               <a:rPr/>
-              <a:t>Build your own summer vs. winter </a:t>
-            </a:r>
-            <a:r>
-              <a:rPr>
-                <a:latin typeface="Courier"/>
-              </a:rPr>
-              <a:t>case_when()</a:t>
-            </a:r>
-            <a:r>
-              <a:rPr/>
-              <a:t> comparison</a:t>
-            </a:r>
-          </a:p>
-          <a:p>
-            <a:pPr lvl="0"/>
-            <a:r>
-              <a:rPr/>
-              <a:t>Write a short results paragraph comparing your city’s warming rate to Duluth’s</a:t>
+              <a:t>Compare your city’s warming rate to Duluth’s, and predict first — by hand</a:t>
             </a:r>
           </a:p>
         </p:txBody>

--- a/docs/content/weather/weather_lecture.pptx
+++ b/docs/content/weather/weather_lecture.pptx
@@ -3373,7 +3373,7 @@
             </a:pPr>
             <a:r>
               <a:rPr/>
-              <a:t>2026-08-27</a:t>
+              <a:t>2026-09-01</a:t>
             </a:r>
           </a:p>
         </p:txBody>

--- a/docs/content/weather/weather_lecture.pptx
+++ b/docs/content/weather/weather_lecture.pptx
@@ -3373,7 +3373,7 @@
             </a:pPr>
             <a:r>
               <a:rPr/>
-              <a:t>2026-09-01</a:t>
+              <a:t>2026-09-03</a:t>
             </a:r>
           </a:p>
         </p:txBody>

--- a/docs/content/weather/weather_lecture.pptx
+++ b/docs/content/weather/weather_lecture.pptx
@@ -3373,7 +3373,7 @@
             </a:pPr>
             <a:r>
               <a:rPr/>
-              <a:t>2026-09-03</a:t>
+              <a:t>2026-09-04</a:t>
             </a:r>
           </a:p>
         </p:txBody>
